--- a/docs/BFF-Architecture-Overview.pptx
+++ b/docs/BFF-Architecture-Overview.pptx
@@ -3880,9 +3880,9 @@
           <p:nvPr/>
         </p:nvSpPr>
         <p:spPr>
-          <a:xfrm>
-            <a:off x="9052560" y="4297680"/>
-            <a:ext cx="-2194560" cy="685800"/>
+          <a:xfrm flipH="1">
+            <a:off x="6858000" y="4297680"/>
+            <a:ext cx="2194560" cy="685800"/>
           </a:xfrm>
           <a:prstGeom prst="line">
             <a:avLst/>
@@ -11319,9 +11319,9 @@
           <p:nvPr/>
         </p:nvSpPr>
         <p:spPr>
-          <a:xfrm>
-            <a:off x="8275320" y="3291840"/>
-            <a:ext cx="-1371600" cy="1463040"/>
+          <a:xfrm flipH="1">
+            <a:off x="6903720" y="3291840"/>
+            <a:ext cx="1371600" cy="1463040"/>
           </a:xfrm>
           <a:prstGeom prst="line">
             <a:avLst/>
